--- a/Plans14.pptx
+++ b/Plans14.pptx
@@ -12,6 +12,7 @@
     <p:sldId id="262" r:id="rId6"/>
     <p:sldId id="263" r:id="rId7"/>
     <p:sldId id="266" r:id="rId8"/>
+    <p:sldId id="267" r:id="rId9"/>
   </p:sldIdLst>
   <p:sldSz cx="12192000" cy="6858000"/>
   <p:notesSz cx="6858000" cy="9144000"/>
@@ -4182,7 +4183,7 @@
           <a:p>
             <a:r>
               <a:rPr lang="hu-HU" dirty="0"/>
-              <a:t>14. Feladat – </a:t>
+              <a:t>14. </a:t>
             </a:r>
             <a:r>
               <a:rPr lang="hu-HU" dirty="0" err="1"/>
@@ -4239,8 +4240,12 @@
                   </a:lnSpc>
                 </a:pPr>
                 <a:r>
+                  <a:rPr lang="hu-HU" sz="2400" dirty="0" err="1"/>
+                  <a:t>Calculation</a:t>
+                </a:r>
+                <a:r>
                   <a:rPr lang="hu-HU" sz="2400" dirty="0"/>
-                  <a:t>Számok kiszámítása:</a:t>
+                  <a:t> formula:</a:t>
                 </a:r>
               </a:p>
               <a:p>
@@ -4389,8 +4394,36 @@
                   </a:lnSpc>
                 </a:pPr>
                 <a:r>
+                  <a:rPr lang="hu-HU" sz="2400" dirty="0" err="1"/>
+                  <a:t>Where</a:t>
+                </a:r>
+                <a:r>
                   <a:rPr lang="hu-HU" sz="2400" dirty="0"/>
-                  <a:t>Ahol a következőket jelentik a szimbólumok:</a:t>
+                  <a:t> </a:t>
+                </a:r>
+                <a:r>
+                  <a:rPr lang="hu-HU" sz="2400" dirty="0" err="1"/>
+                  <a:t>the</a:t>
+                </a:r>
+                <a:r>
+                  <a:rPr lang="hu-HU" sz="2400" dirty="0"/>
+                  <a:t> </a:t>
+                </a:r>
+                <a:r>
+                  <a:rPr lang="hu-HU" sz="2400" dirty="0" err="1"/>
+                  <a:t>symbols</a:t>
+                </a:r>
+                <a:r>
+                  <a:rPr lang="hu-HU" sz="2400" dirty="0"/>
+                  <a:t> </a:t>
+                </a:r>
+                <a:r>
+                  <a:rPr lang="hu-HU" sz="2400" dirty="0" err="1"/>
+                  <a:t>are</a:t>
+                </a:r>
+                <a:r>
+                  <a:rPr lang="hu-HU" sz="2400" dirty="0"/>
+                  <a:t>:</a:t>
                 </a:r>
               </a:p>
               <a:p>
@@ -4401,8 +4434,13 @@
                 </a:pPr>
                 <a:r>
                   <a:rPr lang="hu-HU" sz="2000" dirty="0"/>
-                  <a:t>a: szorzó</a:t>
-                </a:r>
+                  <a:t>a: </a:t>
+                </a:r>
+                <a:r>
+                  <a:rPr lang="hu-HU" sz="2000" dirty="0" err="1"/>
+                  <a:t>mutliplier</a:t>
+                </a:r>
+                <a:endParaRPr lang="hu-HU" sz="2000" dirty="0"/>
               </a:p>
               <a:p>
                 <a:pPr lvl="1">
@@ -4412,8 +4450,13 @@
                 </a:pPr>
                 <a:r>
                   <a:rPr lang="hu-HU" sz="2000" dirty="0"/>
-                  <a:t>c: inkrementum</a:t>
-                </a:r>
+                  <a:t>c: </a:t>
+                </a:r>
+                <a:r>
+                  <a:rPr lang="hu-HU" sz="2000" dirty="0" err="1"/>
+                  <a:t>increment</a:t>
+                </a:r>
+                <a:endParaRPr lang="hu-HU" sz="2000" dirty="0"/>
               </a:p>
               <a:p>
                 <a:pPr lvl="1">
@@ -4423,7 +4466,23 @@
                 </a:pPr>
                 <a:r>
                   <a:rPr lang="hu-HU" sz="2000" dirty="0"/>
-                  <a:t>m: modulus, általában </a:t>
+                  <a:t>m: </a:t>
+                </a:r>
+                <a:r>
+                  <a:rPr lang="hu-HU" sz="2000" dirty="0" err="1"/>
+                  <a:t>modulo</a:t>
+                </a:r>
+                <a:r>
+                  <a:rPr lang="hu-HU" sz="2000" dirty="0"/>
+                  <a:t>, </a:t>
+                </a:r>
+                <a:r>
+                  <a:rPr lang="hu-HU" sz="2000" dirty="0" err="1"/>
+                  <a:t>usually</a:t>
+                </a:r>
+                <a:r>
+                  <a:rPr lang="hu-HU" sz="2000" dirty="0"/>
+                  <a:t> </a:t>
                 </a:r>
                 <a14:m>
                   <m:oMath xmlns:m="http://schemas.openxmlformats.org/officeDocument/2006/math">
@@ -4456,7 +4515,7 @@
                 </a14:m>
                 <a:r>
                   <a:rPr lang="hu-HU" sz="2000" dirty="0"/>
-                  <a:t> vagy </a:t>
+                  <a:t> or </a:t>
                 </a:r>
                 <a14:m>
                   <m:oMath xmlns:m="http://schemas.openxmlformats.org/officeDocument/2006/math">
@@ -4526,8 +4585,21 @@
                 </a14:m>
                 <a:r>
                   <a:rPr lang="hu-HU" sz="2000" dirty="0"/>
-                  <a:t>: a mostani random szám</a:t>
-                </a:r>
+                  <a:t>: </a:t>
+                </a:r>
+                <a:r>
+                  <a:rPr lang="hu-HU" sz="2000" dirty="0" err="1"/>
+                  <a:t>current</a:t>
+                </a:r>
+                <a:r>
+                  <a:rPr lang="hu-HU" sz="2000" dirty="0"/>
+                  <a:t> random </a:t>
+                </a:r>
+                <a:r>
+                  <a:rPr lang="hu-HU" sz="2000" dirty="0" err="1"/>
+                  <a:t>number</a:t>
+                </a:r>
+                <a:endParaRPr lang="hu-HU" sz="2000" dirty="0"/>
               </a:p>
               <a:p>
                 <a:pPr lvl="1">
@@ -4572,7 +4644,19 @@
                 </a14:m>
                 <a:r>
                   <a:rPr lang="hu-HU" sz="2000" dirty="0"/>
-                  <a:t>: a következő random szám</a:t>
+                  <a:t>: </a:t>
+                </a:r>
+                <a:r>
+                  <a:rPr lang="hu-HU" sz="2000" dirty="0" err="1"/>
+                  <a:t>next</a:t>
+                </a:r>
+                <a:r>
+                  <a:rPr lang="hu-HU" sz="2000" dirty="0"/>
+                  <a:t> random </a:t>
+                </a:r>
+                <a:r>
+                  <a:rPr lang="hu-HU" sz="2000" dirty="0" err="1"/>
+                  <a:t>number</a:t>
                 </a:r>
                 <a:endParaRPr lang="hu-HU" dirty="0"/>
               </a:p>
@@ -4682,7 +4766,7 @@
           <a:p>
             <a:r>
               <a:rPr lang="hu-HU" dirty="0"/>
-              <a:t>14. Feladat – </a:t>
+              <a:t>14. </a:t>
             </a:r>
             <a:r>
               <a:rPr lang="hu-HU" dirty="0" err="1"/>
@@ -4724,14 +4808,75 @@
           <a:lstStyle/>
           <a:p>
             <a:r>
+              <a:rPr lang="hu-HU" sz="2400" dirty="0" err="1"/>
+              <a:t>Applies</a:t>
+            </a:r>
+            <a:r>
               <a:rPr lang="hu-HU" sz="2400" dirty="0"/>
-              <a:t>Biteken értelmezett XOR és tolás műveleteket alkalmaz a randomok előállításához</a:t>
-            </a:r>
-          </a:p>
-          <a:p>
+              <a:t> XOR and shift </a:t>
+            </a:r>
+            <a:r>
+              <a:rPr lang="hu-HU" sz="2400" dirty="0" err="1"/>
+              <a:t>operations</a:t>
+            </a:r>
             <a:r>
               <a:rPr lang="hu-HU" sz="2400" dirty="0"/>
-              <a:t>Mintaprogram (32 bites):</a:t>
+              <a:t> </a:t>
+            </a:r>
+            <a:r>
+              <a:rPr lang="hu-HU" sz="2400" dirty="0" err="1"/>
+              <a:t>at</a:t>
+            </a:r>
+            <a:r>
+              <a:rPr lang="hu-HU" sz="2400" dirty="0"/>
+              <a:t> </a:t>
+            </a:r>
+            <a:r>
+              <a:rPr lang="hu-HU" sz="2400" dirty="0" err="1"/>
+              <a:t>the</a:t>
+            </a:r>
+            <a:r>
+              <a:rPr lang="hu-HU" sz="2400" dirty="0"/>
+              <a:t> bit </a:t>
+            </a:r>
+            <a:r>
+              <a:rPr lang="hu-HU" sz="2400" dirty="0" err="1"/>
+              <a:t>level</a:t>
+            </a:r>
+            <a:r>
+              <a:rPr lang="hu-HU" sz="2400" dirty="0"/>
+              <a:t> </a:t>
+            </a:r>
+            <a:r>
+              <a:rPr lang="hu-HU" sz="2400" dirty="0" err="1"/>
+              <a:t>to</a:t>
+            </a:r>
+            <a:r>
+              <a:rPr lang="hu-HU" sz="2400" dirty="0"/>
+              <a:t> </a:t>
+            </a:r>
+            <a:r>
+              <a:rPr lang="hu-HU" sz="2400" dirty="0" err="1"/>
+              <a:t>generate</a:t>
+            </a:r>
+            <a:r>
+              <a:rPr lang="hu-HU" sz="2400" dirty="0"/>
+              <a:t> random </a:t>
+            </a:r>
+            <a:r>
+              <a:rPr lang="hu-HU" sz="2400" dirty="0" err="1"/>
+              <a:t>numbers</a:t>
+            </a:r>
+            <a:endParaRPr lang="hu-HU" sz="2400" dirty="0"/>
+          </a:p>
+          <a:p>
+            <a:r>
+              <a:rPr lang="hu-HU" sz="2400" dirty="0" err="1"/>
+              <a:t>Example</a:t>
+            </a:r>
+            <a:r>
+              <a:rPr lang="hu-HU" sz="2400" dirty="0"/>
+              <a:t> program (32 bites):</a:t>
             </a:r>
           </a:p>
         </p:txBody>
@@ -4899,15 +5044,31 @@
           <a:lstStyle/>
           <a:p>
             <a:r>
-              <a:rPr lang="hu-HU"/>
-              <a:t>14. Feladat – Mersenne Twister (</a:t>
-            </a:r>
-            <a:r>
-              <a:rPr lang="hu-HU" i="1"/>
+              <a:rPr lang="hu-HU" dirty="0"/>
+              <a:t>14. </a:t>
+            </a:r>
+            <a:r>
+              <a:rPr lang="hu-HU" dirty="0" err="1"/>
+              <a:t>Mersenne</a:t>
+            </a:r>
+            <a:r>
+              <a:rPr lang="hu-HU" dirty="0"/>
+              <a:t> </a:t>
+            </a:r>
+            <a:r>
+              <a:rPr lang="hu-HU" dirty="0" err="1"/>
+              <a:t>Twister</a:t>
+            </a:r>
+            <a:r>
+              <a:rPr lang="hu-HU" dirty="0"/>
+              <a:t> (</a:t>
+            </a:r>
+            <a:r>
+              <a:rPr lang="hu-HU" i="1" dirty="0" err="1"/>
               <a:t>opc</a:t>
             </a:r>
             <a:r>
-              <a:rPr lang="hu-HU"/>
+              <a:rPr lang="hu-HU" dirty="0"/>
               <a:t>)</a:t>
             </a:r>
             <a:endParaRPr lang="en-US" dirty="0"/>
@@ -4940,27 +5101,141 @@
               <a:lstStyle/>
               <a:p>
                 <a:r>
+                  <a:rPr lang="hu-HU" sz="2400" dirty="0" err="1"/>
+                  <a:t>Generates</a:t>
+                </a:r>
+                <a:r>
                   <a:rPr lang="hu-HU" sz="2400" dirty="0"/>
-                  <a:t>Két lépésben generálja a számokat:</a:t>
+                  <a:t> </a:t>
+                </a:r>
+                <a:r>
+                  <a:rPr lang="hu-HU" sz="2400" dirty="0" err="1"/>
+                  <a:t>numbers</a:t>
+                </a:r>
+                <a:r>
+                  <a:rPr lang="hu-HU" sz="2400" dirty="0"/>
+                  <a:t> in </a:t>
+                </a:r>
+                <a:r>
+                  <a:rPr lang="hu-HU" sz="2400" dirty="0" err="1"/>
+                  <a:t>two</a:t>
+                </a:r>
+                <a:r>
+                  <a:rPr lang="hu-HU" sz="2400" dirty="0"/>
+                  <a:t> </a:t>
+                </a:r>
+                <a:r>
+                  <a:rPr lang="hu-HU" sz="2400" dirty="0" err="1"/>
+                  <a:t>steps</a:t>
+                </a:r>
+                <a:r>
+                  <a:rPr lang="hu-HU" sz="2400" dirty="0"/>
+                  <a:t>:</a:t>
                 </a:r>
               </a:p>
               <a:p>
                 <a:pPr lvl="1"/>
                 <a:r>
+                  <a:rPr lang="hu-HU" sz="2000" dirty="0" err="1"/>
+                  <a:t>Generates</a:t>
+                </a:r>
+                <a:r>
                   <a:rPr lang="hu-HU" sz="2000" dirty="0"/>
-                  <a:t>Egy nagy elemszámú tömböt generál ismétlődő elemekkel</a:t>
-                </a:r>
+                  <a:t> a </a:t>
+                </a:r>
+                <a:r>
+                  <a:rPr lang="hu-HU" sz="2000" dirty="0" err="1"/>
+                  <a:t>large</a:t>
+                </a:r>
+                <a:r>
+                  <a:rPr lang="hu-HU" sz="2000" dirty="0"/>
+                  <a:t> </a:t>
+                </a:r>
+                <a:r>
+                  <a:rPr lang="hu-HU" sz="2000" dirty="0" err="1"/>
+                  <a:t>array</a:t>
+                </a:r>
+                <a:r>
+                  <a:rPr lang="hu-HU" sz="2000" dirty="0"/>
+                  <a:t> of </a:t>
+                </a:r>
+                <a:r>
+                  <a:rPr lang="hu-HU" sz="2000" dirty="0" err="1"/>
+                  <a:t>state</a:t>
+                </a:r>
+                <a:r>
+                  <a:rPr lang="hu-HU" sz="2000" dirty="0"/>
+                  <a:t> </a:t>
+                </a:r>
+                <a:r>
+                  <a:rPr lang="hu-HU" sz="2000" dirty="0" err="1"/>
+                  <a:t>values</a:t>
+                </a:r>
+                <a:r>
+                  <a:rPr lang="hu-HU" sz="2000" dirty="0"/>
+                  <a:t> </a:t>
+                </a:r>
+                <a:r>
+                  <a:rPr lang="hu-HU" sz="2000" dirty="0" err="1"/>
+                  <a:t>using</a:t>
+                </a:r>
+                <a:r>
+                  <a:rPr lang="hu-HU" sz="2000" dirty="0"/>
+                  <a:t> a </a:t>
+                </a:r>
+                <a:r>
+                  <a:rPr lang="hu-HU" sz="2000" dirty="0" err="1"/>
+                  <a:t>recurrence</a:t>
+                </a:r>
+                <a:endParaRPr lang="hu-HU" sz="2000" dirty="0"/>
               </a:p>
               <a:p>
                 <a:pPr lvl="1"/>
                 <a:r>
                   <a:rPr lang="hu-HU" sz="2000" dirty="0" err="1"/>
-                  <a:t>Randomság</a:t>
+                  <a:t>Tempers</a:t>
                 </a:r>
                 <a:r>
                   <a:rPr lang="hu-HU" sz="2000" dirty="0"/>
-                  <a:t> elősegítése érdekében az értékek megvariálása</a:t>
-                </a:r>
+                  <a:t> </a:t>
+                </a:r>
+                <a:r>
+                  <a:rPr lang="hu-HU" sz="2000" dirty="0" err="1"/>
+                  <a:t>the</a:t>
+                </a:r>
+                <a:r>
+                  <a:rPr lang="hu-HU" sz="2000" dirty="0"/>
+                  <a:t> </a:t>
+                </a:r>
+                <a:r>
+                  <a:rPr lang="hu-HU" sz="2000" dirty="0" err="1"/>
+                  <a:t>values</a:t>
+                </a:r>
+                <a:r>
+                  <a:rPr lang="hu-HU" sz="2000" dirty="0"/>
+                  <a:t> </a:t>
+                </a:r>
+                <a:r>
+                  <a:rPr lang="hu-HU" sz="2000" dirty="0" err="1"/>
+                  <a:t>to</a:t>
+                </a:r>
+                <a:r>
+                  <a:rPr lang="hu-HU" sz="2000" dirty="0"/>
+                  <a:t> </a:t>
+                </a:r>
+                <a:r>
+                  <a:rPr lang="hu-HU" sz="2000" dirty="0" err="1"/>
+                  <a:t>improve</a:t>
+                </a:r>
+                <a:r>
+                  <a:rPr lang="hu-HU" sz="2000" dirty="0"/>
+                  <a:t> </a:t>
+                </a:r>
+                <a:r>
+                  <a:rPr lang="hu-HU" sz="2000" dirty="0" err="1"/>
+                  <a:t>randomness</a:t>
+                </a:r>
+                <a:endParaRPr lang="hu-HU" sz="2000" dirty="0"/>
               </a:p>
               <a:p>
                 <a:pPr marL="457200" lvl="1" indent="0">
@@ -4970,8 +5245,52 @@
               </a:p>
               <a:p>
                 <a:r>
+                  <a:rPr lang="hu-HU" sz="2400" dirty="0" err="1"/>
+                  <a:t>It</a:t>
+                </a:r>
+                <a:r>
                   <a:rPr lang="hu-HU" sz="2400" dirty="0"/>
-                  <a:t>Nagy periódusa van, aminek mérete egy </a:t>
+                  <a:t> has a </a:t>
+                </a:r>
+                <a:r>
+                  <a:rPr lang="hu-HU" sz="2400" dirty="0" err="1"/>
+                  <a:t>long</a:t>
+                </a:r>
+                <a:r>
+                  <a:rPr lang="hu-HU" sz="2400" dirty="0"/>
+                  <a:t> </a:t>
+                </a:r>
+                <a:r>
+                  <a:rPr lang="hu-HU" sz="2400" dirty="0" err="1"/>
+                  <a:t>period</a:t>
+                </a:r>
+                <a:r>
+                  <a:rPr lang="hu-HU" sz="2400" dirty="0"/>
+                  <a:t>, </a:t>
+                </a:r>
+                <a:r>
+                  <a:rPr lang="hu-HU" sz="2400" dirty="0" err="1"/>
+                  <a:t>the</a:t>
+                </a:r>
+                <a:r>
+                  <a:rPr lang="hu-HU" sz="2400" dirty="0"/>
+                  <a:t> </a:t>
+                </a:r>
+                <a:r>
+                  <a:rPr lang="hu-HU" sz="2400" dirty="0" err="1"/>
+                  <a:t>size</a:t>
+                </a:r>
+                <a:r>
+                  <a:rPr lang="hu-HU" sz="2400" dirty="0"/>
+                  <a:t> of </a:t>
+                </a:r>
+                <a:r>
+                  <a:rPr lang="hu-HU" sz="2400" dirty="0" err="1"/>
+                  <a:t>which</a:t>
+                </a:r>
+                <a:r>
+                  <a:rPr lang="hu-HU" sz="2400" dirty="0"/>
+                  <a:t> is a </a:t>
                 </a:r>
                 <a:r>
                   <a:rPr lang="hu-HU" sz="2400" dirty="0" err="1"/>
@@ -4979,7 +5298,15 @@
                 </a:r>
                 <a:r>
                   <a:rPr lang="hu-HU" sz="2400" dirty="0"/>
-                  <a:t> prím (</a:t>
+                  <a:t> </a:t>
+                </a:r>
+                <a:r>
+                  <a:rPr lang="hu-HU" sz="2400" dirty="0" err="1"/>
+                  <a:t>prime</a:t>
+                </a:r>
+                <a:r>
+                  <a:rPr lang="hu-HU" sz="2400" dirty="0"/>
+                  <a:t> (</a:t>
                 </a:r>
                 <a14:m>
                   <m:oMath xmlns:m="http://schemas.openxmlformats.org/officeDocument/2006/math">
@@ -5024,8 +5351,112 @@
               <a:p>
                 <a:pPr lvl="1"/>
                 <a:r>
+                  <a:rPr lang="hu-HU" sz="2000" dirty="0" err="1"/>
+                  <a:t>Because</a:t>
+                </a:r>
+                <a:r>
                   <a:rPr lang="hu-HU" sz="2000" dirty="0"/>
-                  <a:t>Emiatt a nagy periodicitás miatt belátható időn belül nem kerül újra generálásra ugyanaz a minta</a:t>
+                  <a:t> of </a:t>
+                </a:r>
+                <a:r>
+                  <a:rPr lang="hu-HU" sz="2000" dirty="0" err="1"/>
+                  <a:t>this</a:t>
+                </a:r>
+                <a:r>
+                  <a:rPr lang="hu-HU" sz="2000" dirty="0"/>
+                  <a:t> </a:t>
+                </a:r>
+                <a:r>
+                  <a:rPr lang="hu-HU" sz="2000" dirty="0" err="1"/>
+                  <a:t>long</a:t>
+                </a:r>
+                <a:r>
+                  <a:rPr lang="hu-HU" sz="2000" dirty="0"/>
+                  <a:t> </a:t>
+                </a:r>
+                <a:r>
+                  <a:rPr lang="hu-HU" sz="2000" dirty="0" err="1"/>
+                  <a:t>period</a:t>
+                </a:r>
+                <a:r>
+                  <a:rPr lang="hu-HU" sz="2000" dirty="0"/>
+                  <a:t>, </a:t>
+                </a:r>
+                <a:r>
+                  <a:rPr lang="hu-HU" sz="2000" dirty="0" err="1"/>
+                  <a:t>the</a:t>
+                </a:r>
+                <a:r>
+                  <a:rPr lang="hu-HU" sz="2000" dirty="0"/>
+                  <a:t> </a:t>
+                </a:r>
+                <a:r>
+                  <a:rPr lang="hu-HU" sz="2000" dirty="0" err="1"/>
+                  <a:t>same</a:t>
+                </a:r>
+                <a:r>
+                  <a:rPr lang="hu-HU" sz="2000" dirty="0"/>
+                  <a:t> </a:t>
+                </a:r>
+                <a:r>
+                  <a:rPr lang="hu-HU" sz="2000" dirty="0" err="1"/>
+                  <a:t>pattern</a:t>
+                </a:r>
+                <a:r>
+                  <a:rPr lang="hu-HU" sz="2000" dirty="0"/>
+                  <a:t> </a:t>
+                </a:r>
+                <a:r>
+                  <a:rPr lang="hu-HU" sz="2000" dirty="0" err="1"/>
+                  <a:t>will</a:t>
+                </a:r>
+                <a:r>
+                  <a:rPr lang="hu-HU" sz="2000" dirty="0"/>
+                  <a:t> </a:t>
+                </a:r>
+                <a:r>
+                  <a:rPr lang="hu-HU" sz="2000" dirty="0" err="1"/>
+                  <a:t>not</a:t>
+                </a:r>
+                <a:r>
+                  <a:rPr lang="hu-HU" sz="2000" dirty="0"/>
+                  <a:t> be re-</a:t>
+                </a:r>
+                <a:r>
+                  <a:rPr lang="hu-HU" sz="2000" dirty="0" err="1"/>
+                  <a:t>generated</a:t>
+                </a:r>
+                <a:r>
+                  <a:rPr lang="hu-HU" sz="2000" dirty="0"/>
+                  <a:t> </a:t>
+                </a:r>
+                <a:r>
+                  <a:rPr lang="hu-HU" sz="2000" dirty="0" err="1"/>
+                  <a:t>within</a:t>
+                </a:r>
+                <a:r>
+                  <a:rPr lang="hu-HU" sz="2000" dirty="0"/>
+                  <a:t> a </a:t>
+                </a:r>
+                <a:r>
+                  <a:rPr lang="hu-HU" sz="2000" dirty="0" err="1"/>
+                  <a:t>foreseeable</a:t>
+                </a:r>
+                <a:r>
+                  <a:rPr lang="hu-HU" sz="2000" dirty="0"/>
+                  <a:t> </a:t>
+                </a:r>
+                <a:r>
+                  <a:rPr lang="hu-HU" sz="2000" dirty="0" err="1"/>
+                  <a:t>amount</a:t>
+                </a:r>
+                <a:r>
+                  <a:rPr lang="hu-HU" sz="2000" dirty="0"/>
+                  <a:t> of </a:t>
+                </a:r>
+                <a:r>
+                  <a:rPr lang="hu-HU" sz="2000" dirty="0" err="1"/>
+                  <a:t>time</a:t>
                 </a:r>
                 <a:endParaRPr lang="en-US" sz="2000" dirty="0"/>
               </a:p>
@@ -5057,7 +5488,7 @@
               <a:blipFill>
                 <a:blip r:embed="rId2"/>
                 <a:stretch>
-                  <a:fillRect l="-889"/>
+                  <a:fillRect l="-889" r="-254"/>
                 </a:stretch>
               </a:blipFill>
             </p:spPr>
@@ -5139,7 +5570,15 @@
           <a:p>
             <a:r>
               <a:rPr lang="hu-HU" dirty="0"/>
-              <a:t>14. Feladat – Khi-Négyzet Próba</a:t>
+              <a:t>14. </a:t>
+            </a:r>
+            <a:r>
+              <a:rPr lang="hu-HU" dirty="0" err="1"/>
+              <a:t>Chi-Square</a:t>
+            </a:r>
+            <a:r>
+              <a:rPr lang="hu-HU" dirty="0"/>
+              <a:t> Test</a:t>
             </a:r>
             <a:endParaRPr lang="en-US" dirty="0"/>
           </a:p>
@@ -5176,9 +5615,74 @@
                   </a:lnSpc>
                 </a:pPr>
                 <a:r>
+                  <a:rPr lang="hu-HU" sz="2400" dirty="0" err="1"/>
+                  <a:t>Checks</a:t>
+                </a:r>
+                <a:r>
                   <a:rPr lang="hu-HU" sz="2400" dirty="0"/>
-                  <a:t>Ellenőrzi, hogy a kapott frekvenciák egyeznek-e az elvártakkal</a:t>
-                </a:r>
+                  <a:t> </a:t>
+                </a:r>
+                <a:r>
+                  <a:rPr lang="hu-HU" sz="2400" dirty="0" err="1"/>
+                  <a:t>whether</a:t>
+                </a:r>
+                <a:r>
+                  <a:rPr lang="hu-HU" sz="2400" dirty="0"/>
+                  <a:t> </a:t>
+                </a:r>
+                <a:r>
+                  <a:rPr lang="hu-HU" sz="2400" dirty="0" err="1"/>
+                  <a:t>the</a:t>
+                </a:r>
+                <a:r>
+                  <a:rPr lang="hu-HU" sz="2400" dirty="0"/>
+                  <a:t> </a:t>
+                </a:r>
+                <a:r>
+                  <a:rPr lang="hu-HU" sz="2400" dirty="0" err="1"/>
+                  <a:t>observed</a:t>
+                </a:r>
+                <a:r>
+                  <a:rPr lang="hu-HU" sz="2400" dirty="0"/>
+                  <a:t> </a:t>
+                </a:r>
+                <a:r>
+                  <a:rPr lang="hu-HU" sz="2400" dirty="0" err="1"/>
+                  <a:t>frequencies</a:t>
+                </a:r>
+                <a:r>
+                  <a:rPr lang="hu-HU" sz="2400" dirty="0"/>
+                  <a:t> </a:t>
+                </a:r>
+                <a:r>
+                  <a:rPr lang="hu-HU" sz="2400" dirty="0" err="1"/>
+                  <a:t>match</a:t>
+                </a:r>
+                <a:r>
+                  <a:rPr lang="hu-HU" sz="2400" dirty="0"/>
+                  <a:t> </a:t>
+                </a:r>
+                <a:r>
+                  <a:rPr lang="hu-HU" sz="2400" dirty="0" err="1"/>
+                  <a:t>the</a:t>
+                </a:r>
+                <a:r>
+                  <a:rPr lang="hu-HU" sz="2400" dirty="0"/>
+                  <a:t> </a:t>
+                </a:r>
+                <a:r>
+                  <a:rPr lang="hu-HU" sz="2400" dirty="0" err="1"/>
+                  <a:t>expected</a:t>
+                </a:r>
+                <a:r>
+                  <a:rPr lang="hu-HU" sz="2400" dirty="0"/>
+                  <a:t> </a:t>
+                </a:r>
+                <a:r>
+                  <a:rPr lang="hu-HU" sz="2400" dirty="0" err="1"/>
+                  <a:t>frequencies</a:t>
+                </a:r>
+                <a:endParaRPr lang="hu-HU" sz="2400" dirty="0"/>
               </a:p>
               <a:p>
                 <a:pPr lvl="1">
@@ -5187,9 +5691,82 @@
                   </a:lnSpc>
                 </a:pPr>
                 <a:r>
+                  <a:rPr lang="hu-HU" sz="2000" dirty="0" err="1"/>
+                  <a:t>Whether</a:t>
+                </a:r>
+                <a:r>
                   <a:rPr lang="hu-HU" sz="2000" dirty="0"/>
-                  <a:t>A számok egyenletesen vannak-e elosztva a különböző intervallumok között</a:t>
-                </a:r>
+                  <a:t> </a:t>
+                </a:r>
+                <a:r>
+                  <a:rPr lang="hu-HU" sz="2000" dirty="0" err="1"/>
+                  <a:t>the</a:t>
+                </a:r>
+                <a:r>
+                  <a:rPr lang="hu-HU" sz="2000" dirty="0"/>
+                  <a:t> </a:t>
+                </a:r>
+                <a:r>
+                  <a:rPr lang="hu-HU" sz="2000" dirty="0" err="1"/>
+                  <a:t>numbers</a:t>
+                </a:r>
+                <a:r>
+                  <a:rPr lang="hu-HU" sz="2000" dirty="0"/>
+                  <a:t> </a:t>
+                </a:r>
+                <a:r>
+                  <a:rPr lang="hu-HU" sz="2000" dirty="0" err="1"/>
+                  <a:t>are</a:t>
+                </a:r>
+                <a:r>
+                  <a:rPr lang="hu-HU" sz="2000" dirty="0"/>
+                  <a:t> </a:t>
+                </a:r>
+                <a:r>
+                  <a:rPr lang="hu-HU" sz="2000" dirty="0" err="1"/>
+                  <a:t>evenly</a:t>
+                </a:r>
+                <a:r>
+                  <a:rPr lang="hu-HU" sz="2000" dirty="0"/>
+                  <a:t> </a:t>
+                </a:r>
+                <a:r>
+                  <a:rPr lang="hu-HU" sz="2000" dirty="0" err="1"/>
+                  <a:t>distributed</a:t>
+                </a:r>
+                <a:r>
+                  <a:rPr lang="hu-HU" sz="2000" dirty="0"/>
+                  <a:t> </a:t>
+                </a:r>
+                <a:r>
+                  <a:rPr lang="hu-HU" sz="2000" dirty="0" err="1"/>
+                  <a:t>across</a:t>
+                </a:r>
+                <a:r>
+                  <a:rPr lang="hu-HU" sz="2000" dirty="0"/>
+                  <a:t> </a:t>
+                </a:r>
+                <a:r>
+                  <a:rPr lang="hu-HU" sz="2000" dirty="0" err="1"/>
+                  <a:t>the</a:t>
+                </a:r>
+                <a:r>
+                  <a:rPr lang="hu-HU" sz="2000" dirty="0"/>
+                  <a:t> </a:t>
+                </a:r>
+                <a:r>
+                  <a:rPr lang="hu-HU" sz="2000" dirty="0" err="1"/>
+                  <a:t>different</a:t>
+                </a:r>
+                <a:r>
+                  <a:rPr lang="hu-HU" sz="2000" dirty="0"/>
+                  <a:t> </a:t>
+                </a:r>
+                <a:r>
+                  <a:rPr lang="hu-HU" sz="2000" dirty="0" err="1"/>
+                  <a:t>intervals</a:t>
+                </a:r>
+                <a:endParaRPr lang="hu-HU" sz="2000" dirty="0"/>
               </a:p>
               <a:p>
                 <a:pPr>
@@ -5198,8 +5775,20 @@
                   </a:lnSpc>
                 </a:pPr>
                 <a:r>
+                  <a:rPr lang="hu-HU" sz="2400" dirty="0" err="1"/>
+                  <a:t>Mathematical</a:t>
+                </a:r>
+                <a:r>
                   <a:rPr lang="hu-HU" sz="2400" dirty="0"/>
-                  <a:t>Matematikai alap:</a:t>
+                  <a:t> </a:t>
+                </a:r>
+                <a:r>
+                  <a:rPr lang="hu-HU" sz="2400" dirty="0" err="1"/>
+                  <a:t>Basis</a:t>
+                </a:r>
+                <a:r>
+                  <a:rPr lang="hu-HU" sz="2400" dirty="0"/>
+                  <a:t>:</a:t>
                 </a:r>
               </a:p>
               <a:p>
@@ -5407,8 +5996,12 @@
                   <a:buNone/>
                 </a:pPr>
                 <a:r>
+                  <a:rPr lang="hu-HU" sz="2400" dirty="0" err="1"/>
+                  <a:t>Where</a:t>
+                </a:r>
+                <a:r>
                   <a:rPr lang="hu-HU" sz="2400" dirty="0"/>
-                  <a:t>Ahol:</a:t>
+                  <a:t>:</a:t>
                 </a:r>
               </a:p>
               <a:p>
@@ -5448,8 +6041,45 @@
                 </a14:m>
                 <a:r>
                   <a:rPr lang="hu-HU" sz="2000" dirty="0"/>
-                  <a:t> = Kapott frekvencia az i. intervallumban</a:t>
-                </a:r>
+                  <a:t> = </a:t>
+                </a:r>
+                <a:r>
+                  <a:rPr lang="hu-HU" sz="2000" dirty="0" err="1"/>
+                  <a:t>Observed</a:t>
+                </a:r>
+                <a:r>
+                  <a:rPr lang="hu-HU" sz="2000" dirty="0"/>
+                  <a:t> </a:t>
+                </a:r>
+                <a:r>
+                  <a:rPr lang="hu-HU" sz="2000" dirty="0" err="1"/>
+                  <a:t>frequency</a:t>
+                </a:r>
+                <a:r>
+                  <a:rPr lang="hu-HU" sz="2000" dirty="0"/>
+                  <a:t> in </a:t>
+                </a:r>
+                <a:r>
+                  <a:rPr lang="hu-HU" sz="2000" dirty="0" err="1"/>
+                  <a:t>the</a:t>
+                </a:r>
+                <a:r>
+                  <a:rPr lang="hu-HU" sz="2000" dirty="0"/>
+                  <a:t> i-</a:t>
+                </a:r>
+                <a:r>
+                  <a:rPr lang="hu-HU" sz="2000" dirty="0" err="1"/>
+                  <a:t>th</a:t>
+                </a:r>
+                <a:r>
+                  <a:rPr lang="hu-HU" sz="2000" dirty="0"/>
+                  <a:t> </a:t>
+                </a:r>
+                <a:r>
+                  <a:rPr lang="hu-HU" sz="2000" dirty="0" err="1"/>
+                  <a:t>interval</a:t>
+                </a:r>
+                <a:endParaRPr lang="hu-HU" sz="2000" dirty="0"/>
               </a:p>
               <a:p>
                 <a:pPr>
@@ -5488,8 +6118,45 @@
                 </a14:m>
                 <a:r>
                   <a:rPr lang="hu-HU" sz="2000" dirty="0"/>
-                  <a:t> = Elvárt frekvencia az i. intervallumban</a:t>
-                </a:r>
+                  <a:t> = </a:t>
+                </a:r>
+                <a:r>
+                  <a:rPr lang="hu-HU" sz="2000" dirty="0" err="1"/>
+                  <a:t>Expected</a:t>
+                </a:r>
+                <a:r>
+                  <a:rPr lang="hu-HU" sz="2000" dirty="0"/>
+                  <a:t> </a:t>
+                </a:r>
+                <a:r>
+                  <a:rPr lang="hu-HU" sz="2000" dirty="0" err="1"/>
+                  <a:t>frequency</a:t>
+                </a:r>
+                <a:r>
+                  <a:rPr lang="hu-HU" sz="2000" dirty="0"/>
+                  <a:t> in </a:t>
+                </a:r>
+                <a:r>
+                  <a:rPr lang="hu-HU" sz="2000" dirty="0" err="1"/>
+                  <a:t>the</a:t>
+                </a:r>
+                <a:r>
+                  <a:rPr lang="hu-HU" sz="2000" dirty="0"/>
+                  <a:t> i-</a:t>
+                </a:r>
+                <a:r>
+                  <a:rPr lang="hu-HU" sz="2000" dirty="0" err="1"/>
+                  <a:t>th</a:t>
+                </a:r>
+                <a:r>
+                  <a:rPr lang="hu-HU" sz="2000" dirty="0"/>
+                  <a:t> </a:t>
+                </a:r>
+                <a:r>
+                  <a:rPr lang="hu-HU" sz="2000" dirty="0" err="1"/>
+                  <a:t>interval</a:t>
+                </a:r>
+                <a:endParaRPr lang="hu-HU" sz="2000" dirty="0"/>
               </a:p>
               <a:p>
                 <a:pPr>
@@ -5499,8 +6166,29 @@
                 </a:pPr>
                 <a:r>
                   <a:rPr lang="hu-HU" sz="2000" dirty="0"/>
-                  <a:t>Összesítjük az összes (k) intervallumra</a:t>
-                </a:r>
+                  <a:t>Sum </a:t>
+                </a:r>
+                <a:r>
+                  <a:rPr lang="hu-HU" sz="2000" dirty="0" err="1"/>
+                  <a:t>this</a:t>
+                </a:r>
+                <a:r>
+                  <a:rPr lang="hu-HU" sz="2000" dirty="0"/>
+                  <a:t> over </a:t>
+                </a:r>
+                <a:r>
+                  <a:rPr lang="hu-HU" sz="2000" dirty="0" err="1"/>
+                  <a:t>all</a:t>
+                </a:r>
+                <a:r>
+                  <a:rPr lang="hu-HU" sz="2000" dirty="0"/>
+                  <a:t> (k) </a:t>
+                </a:r>
+                <a:r>
+                  <a:rPr lang="hu-HU" sz="2000" dirty="0" err="1"/>
+                  <a:t>intervals</a:t>
+                </a:r>
+                <a:endParaRPr lang="hu-HU" sz="2000" dirty="0"/>
               </a:p>
             </p:txBody>
           </p:sp>
@@ -5608,7 +6296,11 @@
           <a:p>
             <a:r>
               <a:rPr lang="hu-HU" dirty="0"/>
-              <a:t>14. Feladat – Bónusz pontok</a:t>
+              <a:t>14. Bonus </a:t>
+            </a:r>
+            <a:r>
+              <a:rPr lang="hu-HU" dirty="0" err="1"/>
+              <a:t>Points</a:t>
             </a:r>
             <a:endParaRPr lang="en-US" dirty="0"/>
           </a:p>
@@ -5644,7 +6336,11 @@
             </a:pPr>
             <a:r>
               <a:rPr lang="hu-HU" sz="2400" dirty="0"/>
-              <a:t>Lokális memória</a:t>
+              <a:t>Local </a:t>
+            </a:r>
+            <a:r>
+              <a:rPr lang="hu-HU" sz="2400" dirty="0" err="1"/>
+              <a:t>Memory</a:t>
             </a:r>
             <a:endParaRPr lang="en-US" sz="2400" dirty="0"/>
           </a:p>
@@ -5655,12 +6351,8 @@
               </a:lnSpc>
             </a:pPr>
             <a:r>
-              <a:rPr lang="hu-HU" sz="2400" dirty="0" err="1"/>
-              <a:t>Workgroup</a:t>
-            </a:r>
-            <a:r>
               <a:rPr lang="hu-HU" sz="2400" dirty="0"/>
-              <a:t>-ok </a:t>
+              <a:t>Workgroups </a:t>
             </a:r>
           </a:p>
           <a:p>
@@ -5682,7 +6374,7 @@
             </a:pPr>
             <a:r>
               <a:rPr lang="hu-HU" sz="2400" dirty="0"/>
-              <a:t>Tesztelés</a:t>
+              <a:t>Testing (+1)</a:t>
             </a:r>
           </a:p>
           <a:p>
@@ -5713,8 +6405,13 @@
             </a:pPr>
             <a:r>
               <a:rPr lang="hu-HU" sz="2400" dirty="0"/>
-              <a:t>Monte Carlo szimuláció</a:t>
-            </a:r>
+              <a:t>Monte Carlo </a:t>
+            </a:r>
+            <a:r>
+              <a:rPr lang="hu-HU" sz="2400" dirty="0" err="1"/>
+              <a:t>simulation</a:t>
+            </a:r>
+            <a:endParaRPr lang="hu-HU" sz="2400" dirty="0"/>
           </a:p>
           <a:p>
             <a:pPr lvl="1">
@@ -5728,8 +6425,13 @@
             </a:r>
             <a:r>
               <a:rPr lang="hu-HU" sz="2000" dirty="0"/>
-              <a:t> becslés</a:t>
-            </a:r>
+              <a:t> </a:t>
+            </a:r>
+            <a:r>
+              <a:rPr lang="hu-HU" sz="2000" dirty="0" err="1"/>
+              <a:t>estimation</a:t>
+            </a:r>
+            <a:endParaRPr lang="hu-HU" sz="2000" dirty="0"/>
           </a:p>
           <a:p>
             <a:pPr lvl="1">
@@ -5739,7 +6441,15 @@
             </a:pPr>
             <a:r>
               <a:rPr lang="hu-HU" sz="2000" dirty="0"/>
-              <a:t>Pénzügyi szimuláció (</a:t>
+              <a:t>Financial </a:t>
+            </a:r>
+            <a:r>
+              <a:rPr lang="hu-HU" sz="2000" dirty="0" err="1"/>
+              <a:t>Simulation</a:t>
+            </a:r>
+            <a:r>
+              <a:rPr lang="hu-HU" sz="2000" dirty="0"/>
+              <a:t> (</a:t>
             </a:r>
             <a:r>
               <a:rPr lang="hu-HU" sz="2000" i="1" dirty="0" err="1"/>
@@ -5832,7 +6542,7 @@
           <a:p>
             <a:r>
               <a:rPr lang="hu-HU" dirty="0"/>
-              <a:t>14. Feladat – Monte Carlo (</a:t>
+              <a:t>14. Monte Carlo (</a:t>
             </a:r>
             <a:r>
               <a:rPr lang="el-GR" dirty="0"/>
@@ -5840,7 +6550,15 @@
             </a:r>
             <a:r>
               <a:rPr lang="hu-HU" dirty="0"/>
-              <a:t> becslés)</a:t>
+              <a:t> </a:t>
+            </a:r>
+            <a:r>
+              <a:rPr lang="hu-HU" dirty="0" err="1"/>
+              <a:t>estimation</a:t>
+            </a:r>
+            <a:r>
+              <a:rPr lang="hu-HU" dirty="0"/>
+              <a:t>)</a:t>
             </a:r>
             <a:endParaRPr lang="en-US" dirty="0"/>
           </a:p>
@@ -5873,26 +6591,88 @@
               <a:p>
                 <a:r>
                   <a:rPr lang="hu-HU" sz="2400" dirty="0"/>
-                  <a:t>Egy 2D-s négyzetet és körlapot használ</a:t>
-                </a:r>
+                  <a:t>Uses a 2D </a:t>
+                </a:r>
+                <a:r>
+                  <a:rPr lang="hu-HU" sz="2400" dirty="0" err="1"/>
+                  <a:t>square</a:t>
+                </a:r>
+                <a:r>
+                  <a:rPr lang="hu-HU" sz="2400" dirty="0"/>
+                  <a:t> and </a:t>
+                </a:r>
+                <a:r>
+                  <a:rPr lang="hu-HU" sz="2400" dirty="0" err="1"/>
+                  <a:t>circle</a:t>
+                </a:r>
+                <a:endParaRPr lang="hu-HU" sz="2400" dirty="0"/>
               </a:p>
               <a:p>
                 <a:r>
                   <a:rPr lang="hu-HU" sz="2400" dirty="0"/>
-                  <a:t>Mindkét alakzat középpontja az origó</a:t>
-                </a:r>
+                  <a:t>The center of </a:t>
+                </a:r>
+                <a:r>
+                  <a:rPr lang="hu-HU" sz="2400" dirty="0" err="1"/>
+                  <a:t>both</a:t>
+                </a:r>
+                <a:r>
+                  <a:rPr lang="hu-HU" sz="2400" dirty="0"/>
+                  <a:t> </a:t>
+                </a:r>
+                <a:r>
+                  <a:rPr lang="hu-HU" sz="2400" dirty="0" err="1"/>
+                  <a:t>shapes</a:t>
+                </a:r>
+                <a:r>
+                  <a:rPr lang="hu-HU" sz="2400" dirty="0"/>
+                  <a:t> is </a:t>
+                </a:r>
+                <a:r>
+                  <a:rPr lang="hu-HU" sz="2400" dirty="0" err="1"/>
+                  <a:t>the</a:t>
+                </a:r>
+                <a:r>
+                  <a:rPr lang="hu-HU" sz="2400" dirty="0"/>
+                  <a:t> </a:t>
+                </a:r>
+                <a:r>
+                  <a:rPr lang="hu-HU" sz="2400" dirty="0" err="1"/>
+                  <a:t>origin</a:t>
+                </a:r>
+                <a:endParaRPr lang="hu-HU" sz="2400" dirty="0"/>
               </a:p>
               <a:p>
                 <a:r>
+                  <a:rPr lang="hu-HU" sz="2400" dirty="0" err="1"/>
+                  <a:t>Properties</a:t>
+                </a:r>
+                <a:r>
                   <a:rPr lang="hu-HU" sz="2400" dirty="0"/>
-                  <a:t>Alakzatok tulajdonságai:</a:t>
+                  <a:t> of </a:t>
+                </a:r>
+                <a:r>
+                  <a:rPr lang="hu-HU" sz="2400" dirty="0" err="1"/>
+                  <a:t>the</a:t>
+                </a:r>
+                <a:r>
+                  <a:rPr lang="hu-HU" sz="2400" dirty="0"/>
+                  <a:t> </a:t>
+                </a:r>
+                <a:r>
+                  <a:rPr lang="hu-HU" sz="2400" dirty="0" err="1"/>
+                  <a:t>shapes</a:t>
+                </a:r>
+                <a:r>
+                  <a:rPr lang="hu-HU" sz="2400" dirty="0"/>
+                  <a:t>:</a:t>
                 </a:r>
               </a:p>
               <a:p>
                 <a:pPr lvl="1"/>
                 <a:r>
                   <a:rPr lang="hu-HU" sz="2000" dirty="0" err="1"/>
-                  <a:t>Négyzet</a:t>
+                  <a:t>Square</a:t>
                 </a:r>
                 <a:r>
                   <a:rPr lang="hu-HU" sz="2000" baseline="-25000" dirty="0" err="1"/>
@@ -5978,7 +6758,7 @@
                 <a:pPr lvl="1"/>
                 <a:r>
                   <a:rPr lang="hu-HU" sz="2000" dirty="0" err="1"/>
-                  <a:t>Körlap</a:t>
+                  <a:t>Circle</a:t>
                 </a:r>
                 <a:r>
                   <a:rPr lang="hu-HU" sz="2000" baseline="-25000" dirty="0" err="1"/>
@@ -6132,31 +6912,186 @@
               </a:p>
               <a:p>
                 <a:r>
+                  <a:rPr lang="hu-HU" sz="2400" dirty="0" err="1"/>
+                  <a:t>Operation</a:t>
+                </a:r>
+                <a:r>
                   <a:rPr lang="hu-HU" sz="2400" dirty="0"/>
-                  <a:t>Működés:</a:t>
+                  <a:t>:</a:t>
                 </a:r>
               </a:p>
               <a:p>
                 <a:pPr lvl="1"/>
                 <a:r>
+                  <a:rPr lang="hu-HU" sz="2000" dirty="0" err="1"/>
+                  <a:t>Generating</a:t>
+                </a:r>
+                <a:r>
                   <a:rPr lang="hu-HU" sz="2000" dirty="0"/>
-                  <a:t>Random pontok generálása a négyzeten belül</a:t>
-                </a:r>
+                  <a:t> random </a:t>
+                </a:r>
+                <a:r>
+                  <a:rPr lang="hu-HU" sz="2000" dirty="0" err="1"/>
+                  <a:t>points</a:t>
+                </a:r>
+                <a:r>
+                  <a:rPr lang="hu-HU" sz="2000" dirty="0"/>
+                  <a:t> </a:t>
+                </a:r>
+                <a:r>
+                  <a:rPr lang="hu-HU" sz="2000" dirty="0" err="1"/>
+                  <a:t>inside</a:t>
+                </a:r>
+                <a:r>
+                  <a:rPr lang="hu-HU" sz="2000" dirty="0"/>
+                  <a:t> </a:t>
+                </a:r>
+                <a:r>
+                  <a:rPr lang="hu-HU" sz="2000" dirty="0" err="1"/>
+                  <a:t>the</a:t>
+                </a:r>
+                <a:r>
+                  <a:rPr lang="hu-HU" sz="2000" dirty="0"/>
+                  <a:t> </a:t>
+                </a:r>
+                <a:r>
+                  <a:rPr lang="hu-HU" sz="2000" dirty="0" err="1"/>
+                  <a:t>square</a:t>
+                </a:r>
+                <a:endParaRPr lang="hu-HU" sz="2000" dirty="0"/>
               </a:p>
               <a:p>
                 <a:pPr lvl="1"/>
                 <a:r>
                   <a:rPr lang="hu-HU" sz="2000" dirty="0"/>
-                  <a:t>A körön belüli pontok a körön kívüli pontokhoz vett arányának a négyszerese egyenlő lesz </a:t>
-                </a:r>
-                <a:r>
-                  <a:rPr lang="el-GR" sz="2000" dirty="0"/>
-                  <a:t>π</a:t>
+                  <a:t>The ration of </a:t>
+                </a:r>
+                <a:r>
+                  <a:rPr lang="hu-HU" sz="2000" dirty="0" err="1"/>
+                  <a:t>points</a:t>
                 </a:r>
                 <a:r>
                   <a:rPr lang="hu-HU" sz="2000" dirty="0"/>
-                  <a:t>-vel</a:t>
-                </a:r>
+                  <a:t> </a:t>
+                </a:r>
+                <a:r>
+                  <a:rPr lang="hu-HU" sz="2000" dirty="0" err="1"/>
+                  <a:t>inside</a:t>
+                </a:r>
+                <a:r>
+                  <a:rPr lang="hu-HU" sz="2000" dirty="0"/>
+                  <a:t> </a:t>
+                </a:r>
+                <a:r>
+                  <a:rPr lang="hu-HU" sz="2000" dirty="0" err="1"/>
+                  <a:t>the</a:t>
+                </a:r>
+                <a:r>
+                  <a:rPr lang="hu-HU" sz="2000" dirty="0"/>
+                  <a:t> </a:t>
+                </a:r>
+                <a:r>
+                  <a:rPr lang="hu-HU" sz="2000" dirty="0" err="1"/>
+                  <a:t>circle</a:t>
+                </a:r>
+                <a:r>
+                  <a:rPr lang="hu-HU" sz="2000" dirty="0"/>
+                  <a:t> </a:t>
+                </a:r>
+                <a:r>
+                  <a:rPr lang="hu-HU" sz="2000" dirty="0" err="1"/>
+                  <a:t>to</a:t>
+                </a:r>
+                <a:r>
+                  <a:rPr lang="hu-HU" sz="2000" dirty="0"/>
+                  <a:t> </a:t>
+                </a:r>
+                <a:r>
+                  <a:rPr lang="hu-HU" sz="2000" dirty="0" err="1"/>
+                  <a:t>points</a:t>
+                </a:r>
+                <a:r>
+                  <a:rPr lang="hu-HU" sz="2000" dirty="0"/>
+                  <a:t> </a:t>
+                </a:r>
+                <a:r>
+                  <a:rPr lang="hu-HU" sz="2000" dirty="0" err="1"/>
+                  <a:t>inside</a:t>
+                </a:r>
+                <a:r>
+                  <a:rPr lang="hu-HU" sz="2000" dirty="0"/>
+                  <a:t> </a:t>
+                </a:r>
+                <a:r>
+                  <a:rPr lang="hu-HU" sz="2000" dirty="0" err="1"/>
+                  <a:t>the</a:t>
+                </a:r>
+                <a:r>
+                  <a:rPr lang="hu-HU" sz="2000" dirty="0"/>
+                  <a:t> </a:t>
+                </a:r>
+                <a:r>
+                  <a:rPr lang="hu-HU" sz="2000" dirty="0" err="1"/>
+                  <a:t>square</a:t>
+                </a:r>
+                <a:r>
+                  <a:rPr lang="hu-HU" sz="2000" dirty="0"/>
+                  <a:t>, </a:t>
+                </a:r>
+                <a:r>
+                  <a:rPr lang="hu-HU" sz="2000" dirty="0" err="1"/>
+                  <a:t>multiplied</a:t>
+                </a:r>
+                <a:r>
+                  <a:rPr lang="hu-HU" sz="2000" dirty="0"/>
+                  <a:t> </a:t>
+                </a:r>
+                <a:r>
+                  <a:rPr lang="hu-HU" sz="2000" dirty="0" err="1"/>
+                  <a:t>by</a:t>
+                </a:r>
+                <a:r>
+                  <a:rPr lang="hu-HU" sz="2000" dirty="0"/>
+                  <a:t> </a:t>
+                </a:r>
+                <a:r>
+                  <a:rPr lang="hu-HU" sz="2000" dirty="0" err="1"/>
+                  <a:t>four</a:t>
+                </a:r>
+                <a:r>
+                  <a:rPr lang="hu-HU" sz="2000" dirty="0"/>
+                  <a:t>, </a:t>
+                </a:r>
+                <a:r>
+                  <a:rPr lang="hu-HU" sz="2000" dirty="0" err="1"/>
+                  <a:t>will</a:t>
+                </a:r>
+                <a:r>
+                  <a:rPr lang="hu-HU" sz="2000" dirty="0"/>
+                  <a:t> </a:t>
+                </a:r>
+                <a:r>
+                  <a:rPr lang="hu-HU" sz="2000" dirty="0" err="1"/>
+                  <a:t>equal</a:t>
+                </a:r>
+                <a:r>
+                  <a:rPr lang="hu-HU" sz="2000" dirty="0"/>
+                  <a:t> </a:t>
+                </a:r>
+                <a14:m>
+                  <m:oMath xmlns:m="http://schemas.openxmlformats.org/officeDocument/2006/math">
+                    <m:r>
+                      <m:rPr>
+                        <m:sty m:val="p"/>
+                      </m:rPr>
+                      <a:rPr lang="el-GR" sz="2000" b="0" i="1" smtClean="0">
+                        <a:latin typeface="Cambria Math" panose="02040503050406030204" pitchFamily="18" charset="0"/>
+                      </a:rPr>
+                      <m:t>π</m:t>
+                    </m:r>
+                  </m:oMath>
+                </a14:m>
+                <a:endParaRPr lang="hu-HU" sz="2000" dirty="0"/>
               </a:p>
               <a:p>
                 <a:pPr marL="457200" lvl="1" indent="0">
@@ -6224,31 +7159,7 @@
                                 <a:rPr lang="hu-HU" sz="2000" b="0" i="1" smtClean="0">
                                   <a:latin typeface="Cambria Math" panose="02040503050406030204" pitchFamily="18" charset="0"/>
                                 </a:rPr>
-                                <m:t>𝑘</m:t>
-                              </m:r>
-                              <m:r>
-                                <a:rPr lang="hu-HU" sz="2000" b="0" i="1" smtClean="0">
-                                  <a:latin typeface="Cambria Math" panose="02040503050406030204" pitchFamily="18" charset="0"/>
-                                </a:rPr>
-                                <m:t>ö</m:t>
-                              </m:r>
-                              <m:r>
-                                <a:rPr lang="hu-HU" sz="2000" b="0" i="1" smtClean="0">
-                                  <a:latin typeface="Cambria Math" panose="02040503050406030204" pitchFamily="18" charset="0"/>
-                                </a:rPr>
-                                <m:t>𝑟</m:t>
-                              </m:r>
-                              <m:r>
-                                <a:rPr lang="hu-HU" sz="2000" b="0" i="1" smtClean="0">
-                                  <a:latin typeface="Cambria Math" panose="02040503050406030204" pitchFamily="18" charset="0"/>
-                                </a:rPr>
-                                <m:t>ö</m:t>
-                              </m:r>
-                              <m:r>
-                                <a:rPr lang="hu-HU" sz="2000" b="0" i="1" smtClean="0">
-                                  <a:latin typeface="Cambria Math" panose="02040503050406030204" pitchFamily="18" charset="0"/>
-                                </a:rPr>
-                                <m:t>𝑛</m:t>
+                                <m:t>𝑃𝑜𝑖𝑛𝑡𝑠</m:t>
                               </m:r>
                               <m:r>
                                 <a:rPr lang="hu-HU" sz="2000" b="0" i="1" smtClean="0">
@@ -6260,19 +7171,7 @@
                                 <a:rPr lang="hu-HU" sz="2000" b="0" i="1" smtClean="0">
                                   <a:latin typeface="Cambria Math" panose="02040503050406030204" pitchFamily="18" charset="0"/>
                                 </a:rPr>
-                                <m:t>𝑏𝑒𝑙</m:t>
-                              </m:r>
-                              <m:r>
-                                <a:rPr lang="hu-HU" sz="2000" b="0" i="1" smtClean="0">
-                                  <a:latin typeface="Cambria Math" panose="02040503050406030204" pitchFamily="18" charset="0"/>
-                                </a:rPr>
-                                <m:t>ü</m:t>
-                              </m:r>
-                              <m:r>
-                                <a:rPr lang="hu-HU" sz="2000" b="0" i="1" smtClean="0">
-                                  <a:latin typeface="Cambria Math" panose="02040503050406030204" pitchFamily="18" charset="0"/>
-                                </a:rPr>
-                                <m:t>𝑙𝑖</m:t>
+                                <m:t>𝑖𝑛𝑠𝑖𝑑𝑒</m:t>
                               </m:r>
                               <m:r>
                                 <a:rPr lang="hu-HU" sz="2000" b="0" i="1" smtClean="0">
@@ -6284,7 +7183,19 @@
                                 <a:rPr lang="hu-HU" sz="2000" b="0" i="1" smtClean="0">
                                   <a:latin typeface="Cambria Math" panose="02040503050406030204" pitchFamily="18" charset="0"/>
                                 </a:rPr>
-                                <m:t>𝑝𝑜𝑛𝑡𝑜𝑘</m:t>
+                                <m:t>𝑡h𝑒</m:t>
+                              </m:r>
+                              <m:r>
+                                <a:rPr lang="hu-HU" sz="2000" b="0" i="1" smtClean="0">
+                                  <a:latin typeface="Cambria Math" panose="02040503050406030204" pitchFamily="18" charset="0"/>
+                                </a:rPr>
+                                <m:t> </m:t>
+                              </m:r>
+                              <m:r>
+                                <a:rPr lang="hu-HU" sz="2000" b="0" i="1" smtClean="0">
+                                  <a:latin typeface="Cambria Math" panose="02040503050406030204" pitchFamily="18" charset="0"/>
+                                </a:rPr>
+                                <m:t>𝑐𝑖𝑟𝑐𝑙𝑒</m:t>
                               </m:r>
                             </m:e>
                           </m:d>
@@ -6305,31 +7216,7 @@
                                 <a:rPr lang="hu-HU" sz="2000" b="0" i="1" smtClean="0">
                                   <a:latin typeface="Cambria Math" panose="02040503050406030204" pitchFamily="18" charset="0"/>
                                 </a:rPr>
-                                <m:t>𝑘</m:t>
-                              </m:r>
-                              <m:r>
-                                <a:rPr lang="hu-HU" sz="2000" b="0" i="1" smtClean="0">
-                                  <a:latin typeface="Cambria Math" panose="02040503050406030204" pitchFamily="18" charset="0"/>
-                                </a:rPr>
-                                <m:t>ö</m:t>
-                              </m:r>
-                              <m:r>
-                                <a:rPr lang="hu-HU" sz="2000" b="0" i="1" smtClean="0">
-                                  <a:latin typeface="Cambria Math" panose="02040503050406030204" pitchFamily="18" charset="0"/>
-                                </a:rPr>
-                                <m:t>𝑟</m:t>
-                              </m:r>
-                              <m:r>
-                                <a:rPr lang="hu-HU" sz="2000" b="0" i="1" smtClean="0">
-                                  <a:latin typeface="Cambria Math" panose="02040503050406030204" pitchFamily="18" charset="0"/>
-                                </a:rPr>
-                                <m:t>ö</m:t>
-                              </m:r>
-                              <m:r>
-                                <a:rPr lang="hu-HU" sz="2000" b="0" i="1" smtClean="0">
-                                  <a:latin typeface="Cambria Math" panose="02040503050406030204" pitchFamily="18" charset="0"/>
-                                </a:rPr>
-                                <m:t>𝑛</m:t>
+                                <m:t>𝑃𝑜𝑖𝑛𝑡𝑠</m:t>
                               </m:r>
                               <m:r>
                                 <a:rPr lang="hu-HU" sz="2000" b="0" i="1" smtClean="0">
@@ -6341,31 +7228,7 @@
                                 <a:rPr lang="hu-HU" sz="2000" b="0" i="1" smtClean="0">
                                   <a:latin typeface="Cambria Math" panose="02040503050406030204" pitchFamily="18" charset="0"/>
                                 </a:rPr>
-                                <m:t>𝑘</m:t>
-                              </m:r>
-                              <m:r>
-                                <a:rPr lang="hu-HU" sz="2000" b="0" i="1" smtClean="0">
-                                  <a:latin typeface="Cambria Math" panose="02040503050406030204" pitchFamily="18" charset="0"/>
-                                </a:rPr>
-                                <m:t>í</m:t>
-                              </m:r>
-                              <m:r>
-                                <a:rPr lang="hu-HU" sz="2000" b="0" i="1" smtClean="0">
-                                  <a:latin typeface="Cambria Math" panose="02040503050406030204" pitchFamily="18" charset="0"/>
-                                </a:rPr>
-                                <m:t>𝑣</m:t>
-                              </m:r>
-                              <m:r>
-                                <a:rPr lang="hu-HU" sz="2000" b="0" i="1" smtClean="0">
-                                  <a:latin typeface="Cambria Math" panose="02040503050406030204" pitchFamily="18" charset="0"/>
-                                </a:rPr>
-                                <m:t>ü</m:t>
-                              </m:r>
-                              <m:r>
-                                <a:rPr lang="hu-HU" sz="2000" b="0" i="1" smtClean="0">
-                                  <a:latin typeface="Cambria Math" panose="02040503050406030204" pitchFamily="18" charset="0"/>
-                                </a:rPr>
-                                <m:t>𝑙𝑖</m:t>
+                                <m:t>𝑖𝑛𝑠𝑖𝑑𝑒</m:t>
                               </m:r>
                               <m:r>
                                 <a:rPr lang="hu-HU" sz="2000" b="0" i="1" smtClean="0">
@@ -6377,7 +7240,19 @@
                                 <a:rPr lang="hu-HU" sz="2000" b="0" i="1" smtClean="0">
                                   <a:latin typeface="Cambria Math" panose="02040503050406030204" pitchFamily="18" charset="0"/>
                                 </a:rPr>
-                                <m:t>𝑝𝑜𝑛𝑡𝑜𝑘</m:t>
+                                <m:t>𝑡h𝑒</m:t>
+                              </m:r>
+                              <m:r>
+                                <a:rPr lang="hu-HU" sz="2000" b="0" i="1" smtClean="0">
+                                  <a:latin typeface="Cambria Math" panose="02040503050406030204" pitchFamily="18" charset="0"/>
+                                </a:rPr>
+                                <m:t> </m:t>
+                              </m:r>
+                              <m:r>
+                                <a:rPr lang="hu-HU" sz="2000" b="0" i="1" smtClean="0">
+                                  <a:latin typeface="Cambria Math" panose="02040503050406030204" pitchFamily="18" charset="0"/>
+                                </a:rPr>
+                                <m:t>𝑠𝑞𝑢𝑎𝑟𝑒</m:t>
                               </m:r>
                             </m:e>
                           </m:d>
@@ -6435,6 +7310,108 @@
     <p:extLst>
       <p:ext uri="{BB962C8B-B14F-4D97-AF65-F5344CB8AC3E}">
         <p14:creationId xmlns:p14="http://schemas.microsoft.com/office/powerpoint/2010/main" val="2231443377"/>
+      </p:ext>
+    </p:extLst>
+  </p:cSld>
+  <p:clrMapOvr>
+    <a:masterClrMapping/>
+  </p:clrMapOvr>
+</p:sld>
+</file>
+
+<file path=ppt/slides/slide8.xml><?xml version="1.0" encoding="utf-8"?>
+<p:sld xmlns:a="http://schemas.openxmlformats.org/drawingml/2006/main" xmlns:r="http://schemas.openxmlformats.org/officeDocument/2006/relationships" xmlns:p="http://schemas.openxmlformats.org/presentationml/2006/main">
+  <p:cSld>
+    <p:spTree>
+      <p:nvGrpSpPr>
+        <p:cNvPr id="1" name=""/>
+        <p:cNvGrpSpPr/>
+        <p:nvPr/>
+      </p:nvGrpSpPr>
+      <p:grpSpPr>
+        <a:xfrm>
+          <a:off x="0" y="0"/>
+          <a:ext cx="0" cy="0"/>
+          <a:chOff x="0" y="0"/>
+          <a:chExt cx="0" cy="0"/>
+        </a:xfrm>
+      </p:grpSpPr>
+      <p:sp>
+        <p:nvSpPr>
+          <p:cNvPr id="2" name="Cím 1">
+            <a:extLst>
+              <a:ext uri="{FF2B5EF4-FFF2-40B4-BE49-F238E27FC236}">
+                <a16:creationId xmlns:a16="http://schemas.microsoft.com/office/drawing/2014/main" id="{1617A804-9600-9D38-5323-CEEADE3E0C57}"/>
+              </a:ext>
+            </a:extLst>
+          </p:cNvPr>
+          <p:cNvSpPr>
+            <a:spLocks noGrp="1"/>
+          </p:cNvSpPr>
+          <p:nvPr>
+            <p:ph type="ctrTitle"/>
+          </p:nvPr>
+        </p:nvSpPr>
+        <p:spPr/>
+        <p:txBody>
+          <a:bodyPr/>
+          <a:lstStyle/>
+          <a:p>
+            <a:r>
+              <a:rPr lang="hu-HU" dirty="0" err="1"/>
+              <a:t>Thank</a:t>
+            </a:r>
+            <a:r>
+              <a:rPr lang="hu-HU" dirty="0"/>
+              <a:t> </a:t>
+            </a:r>
+            <a:r>
+              <a:rPr lang="hu-HU" dirty="0" err="1"/>
+              <a:t>you</a:t>
+            </a:r>
+            <a:r>
+              <a:rPr lang="hu-HU" dirty="0"/>
+              <a:t>!</a:t>
+            </a:r>
+            <a:endParaRPr lang="en-US" dirty="0"/>
+          </a:p>
+        </p:txBody>
+      </p:sp>
+      <p:sp>
+        <p:nvSpPr>
+          <p:cNvPr id="3" name="Alcím 2">
+            <a:extLst>
+              <a:ext uri="{FF2B5EF4-FFF2-40B4-BE49-F238E27FC236}">
+                <a16:creationId xmlns:a16="http://schemas.microsoft.com/office/drawing/2014/main" id="{43ED9056-4872-9407-3431-C88772165102}"/>
+              </a:ext>
+            </a:extLst>
+          </p:cNvPr>
+          <p:cNvSpPr>
+            <a:spLocks noGrp="1"/>
+          </p:cNvSpPr>
+          <p:nvPr>
+            <p:ph type="subTitle" idx="1"/>
+          </p:nvPr>
+        </p:nvSpPr>
+        <p:spPr/>
+        <p:txBody>
+          <a:bodyPr/>
+          <a:lstStyle/>
+          <a:p>
+            <a:r>
+              <a:rPr lang="hu-HU" dirty="0">
+                <a:sym typeface="Wingdings" panose="05000000000000000000" pitchFamily="2" charset="2"/>
+              </a:rPr>
+              <a:t></a:t>
+            </a:r>
+            <a:endParaRPr lang="en-US" dirty="0"/>
+          </a:p>
+        </p:txBody>
+      </p:sp>
+    </p:spTree>
+    <p:extLst>
+      <p:ext uri="{BB962C8B-B14F-4D97-AF65-F5344CB8AC3E}">
+        <p14:creationId xmlns:p14="http://schemas.microsoft.com/office/powerpoint/2010/main" val="2250587383"/>
       </p:ext>
     </p:extLst>
   </p:cSld>
